--- a/(7.1) .pptx
+++ b/(7.1) .pptx
@@ -15,9 +15,6 @@
     <p:sldId id="269" r:id="rId9"/>
     <p:sldId id="264" r:id="rId10"/>
     <p:sldId id="265" r:id="rId11"/>
-    <p:sldId id="266" r:id="rId12"/>
-    <p:sldId id="267" r:id="rId13"/>
-    <p:sldId id="268" r:id="rId14"/>
   </p:sldIdLst>
   <p:sldSz cx="12192000" cy="6858000"/>
   <p:notesSz cx="6858000" cy="9144000"/>
@@ -135,6 +132,104 @@
 </p:presentation>
 </file>
 
+<file path=ppt/revisionInfo.xml><?xml version="1.0" encoding="utf-8"?>
+<p1510:revInfo xmlns:a="http://schemas.openxmlformats.org/drawingml/2006/main" xmlns:r="http://schemas.openxmlformats.org/officeDocument/2006/relationships" xmlns:p1510="http://schemas.microsoft.com/office/powerpoint/2015/10/main">
+  <p1510:revLst>
+    <p1510:client id="{DA671C9C-2838-4162-B2CB-85860C8C966E}" v="4" dt="2026-07-02T02:16:05.850"/>
+  </p1510:revLst>
+</p1510:revInfo>
+</file>
+
+<file path=ppt/changesInfos/changesInfo1.xml><?xml version="1.0" encoding="utf-8"?>
+<pc:chgInfo xmlns:a="http://schemas.openxmlformats.org/drawingml/2006/main" xmlns:r="http://schemas.openxmlformats.org/officeDocument/2006/relationships" xmlns:ac="http://schemas.microsoft.com/office/drawing/2013/main/command" xmlns:pc="http://schemas.microsoft.com/office/powerpoint/2013/main/command">
+  <pc:docChgLst>
+    <pc:chgData name="musukie52@gmail.com" userId="017bd91f96aa8751" providerId="LiveId" clId="{5B2C3894-F97E-4CAB-8812-5BB4D83AAC6A}"/>
+    <pc:docChg chg="custSel addSld delSld modSld">
+      <pc:chgData name="musukie52@gmail.com" userId="017bd91f96aa8751" providerId="LiveId" clId="{5B2C3894-F97E-4CAB-8812-5BB4D83AAC6A}" dt="2026-07-02T02:17:41.949" v="27" actId="47"/>
+      <pc:docMkLst>
+        <pc:docMk/>
+      </pc:docMkLst>
+      <pc:sldChg chg="del">
+        <pc:chgData name="musukie52@gmail.com" userId="017bd91f96aa8751" providerId="LiveId" clId="{5B2C3894-F97E-4CAB-8812-5BB4D83AAC6A}" dt="2026-07-02T02:17:41.949" v="27" actId="47"/>
+        <pc:sldMkLst>
+          <pc:docMk/>
+          <pc:sldMk cId="1106946743" sldId="266"/>
+        </pc:sldMkLst>
+      </pc:sldChg>
+      <pc:sldChg chg="del">
+        <pc:chgData name="musukie52@gmail.com" userId="017bd91f96aa8751" providerId="LiveId" clId="{5B2C3894-F97E-4CAB-8812-5BB4D83AAC6A}" dt="2026-07-02T02:17:41.457" v="26" actId="47"/>
+        <pc:sldMkLst>
+          <pc:docMk/>
+          <pc:sldMk cId="2282664298" sldId="267"/>
+        </pc:sldMkLst>
+      </pc:sldChg>
+      <pc:sldChg chg="del">
+        <pc:chgData name="musukie52@gmail.com" userId="017bd91f96aa8751" providerId="LiveId" clId="{5B2C3894-F97E-4CAB-8812-5BB4D83AAC6A}" dt="2026-07-02T02:17:40.650" v="25" actId="47"/>
+        <pc:sldMkLst>
+          <pc:docMk/>
+          <pc:sldMk cId="3247853843" sldId="268"/>
+        </pc:sldMkLst>
+      </pc:sldChg>
+      <pc:sldChg chg="addSp delSp modSp new del mod">
+        <pc:chgData name="musukie52@gmail.com" userId="017bd91f96aa8751" providerId="LiveId" clId="{5B2C3894-F97E-4CAB-8812-5BB4D83AAC6A}" dt="2026-07-02T02:17:36.502" v="24" actId="47"/>
+        <pc:sldMkLst>
+          <pc:docMk/>
+          <pc:sldMk cId="3940169255" sldId="270"/>
+        </pc:sldMkLst>
+        <pc:spChg chg="del">
+          <ac:chgData name="musukie52@gmail.com" userId="017bd91f96aa8751" providerId="LiveId" clId="{5B2C3894-F97E-4CAB-8812-5BB4D83AAC6A}" dt="2026-07-02T02:15:47.497" v="1" actId="478"/>
+          <ac:spMkLst>
+            <pc:docMk/>
+            <pc:sldMk cId="3940169255" sldId="270"/>
+            <ac:spMk id="2" creationId="{B797279A-8EA2-A5FC-DA1F-EBAB0EA290E7}"/>
+          </ac:spMkLst>
+        </pc:spChg>
+        <pc:spChg chg="del">
+          <ac:chgData name="musukie52@gmail.com" userId="017bd91f96aa8751" providerId="LiveId" clId="{5B2C3894-F97E-4CAB-8812-5BB4D83AAC6A}" dt="2026-07-02T02:15:47.497" v="1" actId="478"/>
+          <ac:spMkLst>
+            <pc:docMk/>
+            <pc:sldMk cId="3940169255" sldId="270"/>
+            <ac:spMk id="3" creationId="{CFE12BA5-82E6-1CB0-2B53-E9F648ACE8C8}"/>
+          </ac:spMkLst>
+        </pc:spChg>
+        <pc:picChg chg="add del mod">
+          <ac:chgData name="musukie52@gmail.com" userId="017bd91f96aa8751" providerId="LiveId" clId="{5B2C3894-F97E-4CAB-8812-5BB4D83AAC6A}" dt="2026-07-02T02:17:26.203" v="20" actId="478"/>
+          <ac:picMkLst>
+            <pc:docMk/>
+            <pc:sldMk cId="3940169255" sldId="270"/>
+            <ac:picMk id="4" creationId="{4A991024-97EC-9E90-D93E-8E27455EA43E}"/>
+          </ac:picMkLst>
+        </pc:picChg>
+        <pc:picChg chg="add del mod">
+          <ac:chgData name="musukie52@gmail.com" userId="017bd91f96aa8751" providerId="LiveId" clId="{5B2C3894-F97E-4CAB-8812-5BB4D83AAC6A}" dt="2026-07-02T02:17:33.519" v="23" actId="478"/>
+          <ac:picMkLst>
+            <pc:docMk/>
+            <pc:sldMk cId="3940169255" sldId="270"/>
+            <ac:picMk id="5" creationId="{27789DDA-0444-0FA9-D470-F215DDC6580B}"/>
+          </ac:picMkLst>
+        </pc:picChg>
+        <pc:picChg chg="add del mod">
+          <ac:chgData name="musukie52@gmail.com" userId="017bd91f96aa8751" providerId="LiveId" clId="{5B2C3894-F97E-4CAB-8812-5BB4D83AAC6A}" dt="2026-07-02T02:17:17.819" v="16" actId="478"/>
+          <ac:picMkLst>
+            <pc:docMk/>
+            <pc:sldMk cId="3940169255" sldId="270"/>
+            <ac:picMk id="6" creationId="{F3558131-7916-F185-8D7E-5855ADD46554}"/>
+          </ac:picMkLst>
+        </pc:picChg>
+        <pc:picChg chg="add del mod">
+          <ac:chgData name="musukie52@gmail.com" userId="017bd91f96aa8751" providerId="LiveId" clId="{5B2C3894-F97E-4CAB-8812-5BB4D83AAC6A}" dt="2026-07-02T02:17:03.985" v="12" actId="478"/>
+          <ac:picMkLst>
+            <pc:docMk/>
+            <pc:sldMk cId="3940169255" sldId="270"/>
+            <ac:picMk id="7" creationId="{007768CA-7BB5-FC1D-3E21-53F1A071880B}"/>
+          </ac:picMkLst>
+        </pc:picChg>
+      </pc:sldChg>
+    </pc:docChg>
+  </pc:docChgLst>
+</pc:chgInfo>
+</file>
+
 <file path=ppt/slideLayouts/slideLayout1.xml><?xml version="1.0" encoding="utf-8"?>
 <p:sldLayout xmlns:a="http://schemas.openxmlformats.org/drawingml/2006/main" xmlns:r="http://schemas.openxmlformats.org/officeDocument/2006/relationships" xmlns:p="http://schemas.openxmlformats.org/presentationml/2006/main" type="title" preserve="1">
   <p:cSld name="제목 슬라이드">
@@ -177,10 +272,9 @@
           </a:lstStyle>
           <a:p>
             <a:r>
-              <a:rPr lang="ko-KR" altLang="en-US" smtClean="0"/>
+              <a:rPr lang="ko-KR" altLang="en-US"/>
               <a:t>마스터 제목 스타일 편집</a:t>
             </a:r>
-            <a:endParaRPr lang="ko-KR" altLang="en-US"/>
           </a:p>
         </p:txBody>
       </p:sp>
@@ -242,10 +336,9 @@
           </a:lstStyle>
           <a:p>
             <a:r>
-              <a:rPr lang="ko-KR" altLang="en-US" smtClean="0"/>
+              <a:rPr lang="ko-KR" altLang="en-US"/>
               <a:t>클릭하여 마스터 부제목 스타일 편집</a:t>
             </a:r>
-            <a:endParaRPr lang="ko-KR" altLang="en-US"/>
           </a:p>
         </p:txBody>
       </p:sp>
@@ -266,7 +359,7 @@
           <a:p>
             <a:fld id="{8749EECF-A286-4451-B3E5-D3206A380227}" type="datetimeFigureOut">
               <a:rPr lang="ko-KR" altLang="en-US" smtClean="0"/>
-              <a:t>2026-07-01</a:t>
+              <a:t>2026-07-02</a:t>
             </a:fld>
             <a:endParaRPr lang="ko-KR" altLang="en-US"/>
           </a:p>
@@ -360,10 +453,9 @@
           <a:lstStyle/>
           <a:p>
             <a:r>
-              <a:rPr lang="ko-KR" altLang="en-US" smtClean="0"/>
+              <a:rPr lang="ko-KR" altLang="en-US"/>
               <a:t>마스터 제목 스타일 편집</a:t>
             </a:r>
-            <a:endParaRPr lang="ko-KR" altLang="en-US"/>
           </a:p>
         </p:txBody>
       </p:sp>
@@ -384,38 +476,37 @@
           <a:p>
             <a:pPr lvl="0"/>
             <a:r>
-              <a:rPr lang="ko-KR" altLang="en-US" smtClean="0"/>
+              <a:rPr lang="ko-KR" altLang="en-US"/>
               <a:t>마스터 텍스트 스타일 편집</a:t>
             </a:r>
           </a:p>
           <a:p>
             <a:pPr lvl="1"/>
             <a:r>
-              <a:rPr lang="ko-KR" altLang="en-US" smtClean="0"/>
+              <a:rPr lang="ko-KR" altLang="en-US"/>
               <a:t>둘째 수준</a:t>
             </a:r>
           </a:p>
           <a:p>
             <a:pPr lvl="2"/>
             <a:r>
-              <a:rPr lang="ko-KR" altLang="en-US" smtClean="0"/>
+              <a:rPr lang="ko-KR" altLang="en-US"/>
               <a:t>셋째 수준</a:t>
             </a:r>
           </a:p>
           <a:p>
             <a:pPr lvl="3"/>
             <a:r>
-              <a:rPr lang="ko-KR" altLang="en-US" smtClean="0"/>
+              <a:rPr lang="ko-KR" altLang="en-US"/>
               <a:t>넷째 수준</a:t>
             </a:r>
           </a:p>
           <a:p>
             <a:pPr lvl="4"/>
             <a:r>
-              <a:rPr lang="ko-KR" altLang="en-US" smtClean="0"/>
+              <a:rPr lang="ko-KR" altLang="en-US"/>
               <a:t>다섯째 수준</a:t>
             </a:r>
-            <a:endParaRPr lang="ko-KR" altLang="en-US"/>
           </a:p>
         </p:txBody>
       </p:sp>
@@ -436,7 +527,7 @@
           <a:p>
             <a:fld id="{8749EECF-A286-4451-B3E5-D3206A380227}" type="datetimeFigureOut">
               <a:rPr lang="ko-KR" altLang="en-US" smtClean="0"/>
-              <a:t>2026-07-01</a:t>
+              <a:t>2026-07-02</a:t>
             </a:fld>
             <a:endParaRPr lang="ko-KR" altLang="en-US"/>
           </a:p>
@@ -535,10 +626,9 @@
           <a:lstStyle/>
           <a:p>
             <a:r>
-              <a:rPr lang="ko-KR" altLang="en-US" smtClean="0"/>
+              <a:rPr lang="ko-KR" altLang="en-US"/>
               <a:t>마스터 제목 스타일 편집</a:t>
             </a:r>
-            <a:endParaRPr lang="ko-KR" altLang="en-US"/>
           </a:p>
         </p:txBody>
       </p:sp>
@@ -564,38 +654,37 @@
           <a:p>
             <a:pPr lvl="0"/>
             <a:r>
-              <a:rPr lang="ko-KR" altLang="en-US" smtClean="0"/>
+              <a:rPr lang="ko-KR" altLang="en-US"/>
               <a:t>마스터 텍스트 스타일 편집</a:t>
             </a:r>
           </a:p>
           <a:p>
             <a:pPr lvl="1"/>
             <a:r>
-              <a:rPr lang="ko-KR" altLang="en-US" smtClean="0"/>
+              <a:rPr lang="ko-KR" altLang="en-US"/>
               <a:t>둘째 수준</a:t>
             </a:r>
           </a:p>
           <a:p>
             <a:pPr lvl="2"/>
             <a:r>
-              <a:rPr lang="ko-KR" altLang="en-US" smtClean="0"/>
+              <a:rPr lang="ko-KR" altLang="en-US"/>
               <a:t>셋째 수준</a:t>
             </a:r>
           </a:p>
           <a:p>
             <a:pPr lvl="3"/>
             <a:r>
-              <a:rPr lang="ko-KR" altLang="en-US" smtClean="0"/>
+              <a:rPr lang="ko-KR" altLang="en-US"/>
               <a:t>넷째 수준</a:t>
             </a:r>
           </a:p>
           <a:p>
             <a:pPr lvl="4"/>
             <a:r>
-              <a:rPr lang="ko-KR" altLang="en-US" smtClean="0"/>
+              <a:rPr lang="ko-KR" altLang="en-US"/>
               <a:t>다섯째 수준</a:t>
             </a:r>
-            <a:endParaRPr lang="ko-KR" altLang="en-US"/>
           </a:p>
         </p:txBody>
       </p:sp>
@@ -616,7 +705,7 @@
           <a:p>
             <a:fld id="{8749EECF-A286-4451-B3E5-D3206A380227}" type="datetimeFigureOut">
               <a:rPr lang="ko-KR" altLang="en-US" smtClean="0"/>
-              <a:t>2026-07-01</a:t>
+              <a:t>2026-07-02</a:t>
             </a:fld>
             <a:endParaRPr lang="ko-KR" altLang="en-US"/>
           </a:p>
@@ -710,10 +799,9 @@
           <a:lstStyle/>
           <a:p>
             <a:r>
-              <a:rPr lang="ko-KR" altLang="en-US" smtClean="0"/>
+              <a:rPr lang="ko-KR" altLang="en-US"/>
               <a:t>마스터 제목 스타일 편집</a:t>
             </a:r>
-            <a:endParaRPr lang="ko-KR" altLang="en-US"/>
           </a:p>
         </p:txBody>
       </p:sp>
@@ -734,38 +822,37 @@
           <a:p>
             <a:pPr lvl="0"/>
             <a:r>
-              <a:rPr lang="ko-KR" altLang="en-US" smtClean="0"/>
+              <a:rPr lang="ko-KR" altLang="en-US"/>
               <a:t>마스터 텍스트 스타일 편집</a:t>
             </a:r>
           </a:p>
           <a:p>
             <a:pPr lvl="1"/>
             <a:r>
-              <a:rPr lang="ko-KR" altLang="en-US" smtClean="0"/>
+              <a:rPr lang="ko-KR" altLang="en-US"/>
               <a:t>둘째 수준</a:t>
             </a:r>
           </a:p>
           <a:p>
             <a:pPr lvl="2"/>
             <a:r>
-              <a:rPr lang="ko-KR" altLang="en-US" smtClean="0"/>
+              <a:rPr lang="ko-KR" altLang="en-US"/>
               <a:t>셋째 수준</a:t>
             </a:r>
           </a:p>
           <a:p>
             <a:pPr lvl="3"/>
             <a:r>
-              <a:rPr lang="ko-KR" altLang="en-US" smtClean="0"/>
+              <a:rPr lang="ko-KR" altLang="en-US"/>
               <a:t>넷째 수준</a:t>
             </a:r>
           </a:p>
           <a:p>
             <a:pPr lvl="4"/>
             <a:r>
-              <a:rPr lang="ko-KR" altLang="en-US" smtClean="0"/>
+              <a:rPr lang="ko-KR" altLang="en-US"/>
               <a:t>다섯째 수준</a:t>
             </a:r>
-            <a:endParaRPr lang="ko-KR" altLang="en-US"/>
           </a:p>
         </p:txBody>
       </p:sp>
@@ -786,7 +873,7 @@
           <a:p>
             <a:fld id="{8749EECF-A286-4451-B3E5-D3206A380227}" type="datetimeFigureOut">
               <a:rPr lang="ko-KR" altLang="en-US" smtClean="0"/>
-              <a:t>2026-07-01</a:t>
+              <a:t>2026-07-02</a:t>
             </a:fld>
             <a:endParaRPr lang="ko-KR" altLang="en-US"/>
           </a:p>
@@ -889,10 +976,9 @@
           </a:lstStyle>
           <a:p>
             <a:r>
-              <a:rPr lang="ko-KR" altLang="en-US" smtClean="0"/>
+              <a:rPr lang="ko-KR" altLang="en-US"/>
               <a:t>마스터 제목 스타일 편집</a:t>
             </a:r>
-            <a:endParaRPr lang="ko-KR" altLang="en-US"/>
           </a:p>
         </p:txBody>
       </p:sp>
@@ -1009,7 +1095,7 @@
           <a:p>
             <a:pPr lvl="0"/>
             <a:r>
-              <a:rPr lang="ko-KR" altLang="en-US" smtClean="0"/>
+              <a:rPr lang="ko-KR" altLang="en-US"/>
               <a:t>마스터 텍스트 스타일 편집</a:t>
             </a:r>
           </a:p>
@@ -1032,7 +1118,7 @@
           <a:p>
             <a:fld id="{8749EECF-A286-4451-B3E5-D3206A380227}" type="datetimeFigureOut">
               <a:rPr lang="ko-KR" altLang="en-US" smtClean="0"/>
-              <a:t>2026-07-01</a:t>
+              <a:t>2026-07-02</a:t>
             </a:fld>
             <a:endParaRPr lang="ko-KR" altLang="en-US"/>
           </a:p>
@@ -1126,10 +1212,9 @@
           <a:lstStyle/>
           <a:p>
             <a:r>
-              <a:rPr lang="ko-KR" altLang="en-US" smtClean="0"/>
+              <a:rPr lang="ko-KR" altLang="en-US"/>
               <a:t>마스터 제목 스타일 편집</a:t>
             </a:r>
-            <a:endParaRPr lang="ko-KR" altLang="en-US"/>
           </a:p>
         </p:txBody>
       </p:sp>
@@ -1155,38 +1240,37 @@
           <a:p>
             <a:pPr lvl="0"/>
             <a:r>
-              <a:rPr lang="ko-KR" altLang="en-US" smtClean="0"/>
+              <a:rPr lang="ko-KR" altLang="en-US"/>
               <a:t>마스터 텍스트 스타일 편집</a:t>
             </a:r>
           </a:p>
           <a:p>
             <a:pPr lvl="1"/>
             <a:r>
-              <a:rPr lang="ko-KR" altLang="en-US" smtClean="0"/>
+              <a:rPr lang="ko-KR" altLang="en-US"/>
               <a:t>둘째 수준</a:t>
             </a:r>
           </a:p>
           <a:p>
             <a:pPr lvl="2"/>
             <a:r>
-              <a:rPr lang="ko-KR" altLang="en-US" smtClean="0"/>
+              <a:rPr lang="ko-KR" altLang="en-US"/>
               <a:t>셋째 수준</a:t>
             </a:r>
           </a:p>
           <a:p>
             <a:pPr lvl="3"/>
             <a:r>
-              <a:rPr lang="ko-KR" altLang="en-US" smtClean="0"/>
+              <a:rPr lang="ko-KR" altLang="en-US"/>
               <a:t>넷째 수준</a:t>
             </a:r>
           </a:p>
           <a:p>
             <a:pPr lvl="4"/>
             <a:r>
-              <a:rPr lang="ko-KR" altLang="en-US" smtClean="0"/>
+              <a:rPr lang="ko-KR" altLang="en-US"/>
               <a:t>다섯째 수준</a:t>
             </a:r>
-            <a:endParaRPr lang="ko-KR" altLang="en-US"/>
           </a:p>
         </p:txBody>
       </p:sp>
@@ -1212,38 +1296,37 @@
           <a:p>
             <a:pPr lvl="0"/>
             <a:r>
-              <a:rPr lang="ko-KR" altLang="en-US" smtClean="0"/>
+              <a:rPr lang="ko-KR" altLang="en-US"/>
               <a:t>마스터 텍스트 스타일 편집</a:t>
             </a:r>
           </a:p>
           <a:p>
             <a:pPr lvl="1"/>
             <a:r>
-              <a:rPr lang="ko-KR" altLang="en-US" smtClean="0"/>
+              <a:rPr lang="ko-KR" altLang="en-US"/>
               <a:t>둘째 수준</a:t>
             </a:r>
           </a:p>
           <a:p>
             <a:pPr lvl="2"/>
             <a:r>
-              <a:rPr lang="ko-KR" altLang="en-US" smtClean="0"/>
+              <a:rPr lang="ko-KR" altLang="en-US"/>
               <a:t>셋째 수준</a:t>
             </a:r>
           </a:p>
           <a:p>
             <a:pPr lvl="3"/>
             <a:r>
-              <a:rPr lang="ko-KR" altLang="en-US" smtClean="0"/>
+              <a:rPr lang="ko-KR" altLang="en-US"/>
               <a:t>넷째 수준</a:t>
             </a:r>
           </a:p>
           <a:p>
             <a:pPr lvl="4"/>
             <a:r>
-              <a:rPr lang="ko-KR" altLang="en-US" smtClean="0"/>
+              <a:rPr lang="ko-KR" altLang="en-US"/>
               <a:t>다섯째 수준</a:t>
             </a:r>
-            <a:endParaRPr lang="ko-KR" altLang="en-US"/>
           </a:p>
         </p:txBody>
       </p:sp>
@@ -1264,7 +1347,7 @@
           <a:p>
             <a:fld id="{8749EECF-A286-4451-B3E5-D3206A380227}" type="datetimeFigureOut">
               <a:rPr lang="ko-KR" altLang="en-US" smtClean="0"/>
-              <a:t>2026-07-01</a:t>
+              <a:t>2026-07-02</a:t>
             </a:fld>
             <a:endParaRPr lang="ko-KR" altLang="en-US"/>
           </a:p>
@@ -1363,10 +1446,9 @@
           <a:lstStyle/>
           <a:p>
             <a:r>
-              <a:rPr lang="ko-KR" altLang="en-US" smtClean="0"/>
+              <a:rPr lang="ko-KR" altLang="en-US"/>
               <a:t>마스터 제목 스타일 편집</a:t>
             </a:r>
-            <a:endParaRPr lang="ko-KR" altLang="en-US"/>
           </a:p>
         </p:txBody>
       </p:sp>
@@ -1429,7 +1511,7 @@
           <a:p>
             <a:pPr lvl="0"/>
             <a:r>
-              <a:rPr lang="ko-KR" altLang="en-US" smtClean="0"/>
+              <a:rPr lang="ko-KR" altLang="en-US"/>
               <a:t>마스터 텍스트 스타일 편집</a:t>
             </a:r>
           </a:p>
@@ -1457,38 +1539,37 @@
           <a:p>
             <a:pPr lvl="0"/>
             <a:r>
-              <a:rPr lang="ko-KR" altLang="en-US" smtClean="0"/>
+              <a:rPr lang="ko-KR" altLang="en-US"/>
               <a:t>마스터 텍스트 스타일 편집</a:t>
             </a:r>
           </a:p>
           <a:p>
             <a:pPr lvl="1"/>
             <a:r>
-              <a:rPr lang="ko-KR" altLang="en-US" smtClean="0"/>
+              <a:rPr lang="ko-KR" altLang="en-US"/>
               <a:t>둘째 수준</a:t>
             </a:r>
           </a:p>
           <a:p>
             <a:pPr lvl="2"/>
             <a:r>
-              <a:rPr lang="ko-KR" altLang="en-US" smtClean="0"/>
+              <a:rPr lang="ko-KR" altLang="en-US"/>
               <a:t>셋째 수준</a:t>
             </a:r>
           </a:p>
           <a:p>
             <a:pPr lvl="3"/>
             <a:r>
-              <a:rPr lang="ko-KR" altLang="en-US" smtClean="0"/>
+              <a:rPr lang="ko-KR" altLang="en-US"/>
               <a:t>넷째 수준</a:t>
             </a:r>
           </a:p>
           <a:p>
             <a:pPr lvl="4"/>
             <a:r>
-              <a:rPr lang="ko-KR" altLang="en-US" smtClean="0"/>
+              <a:rPr lang="ko-KR" altLang="en-US"/>
               <a:t>다섯째 수준</a:t>
             </a:r>
-            <a:endParaRPr lang="ko-KR" altLang="en-US"/>
           </a:p>
         </p:txBody>
       </p:sp>
@@ -1551,7 +1632,7 @@
           <a:p>
             <a:pPr lvl="0"/>
             <a:r>
-              <a:rPr lang="ko-KR" altLang="en-US" smtClean="0"/>
+              <a:rPr lang="ko-KR" altLang="en-US"/>
               <a:t>마스터 텍스트 스타일 편집</a:t>
             </a:r>
           </a:p>
@@ -1579,38 +1660,37 @@
           <a:p>
             <a:pPr lvl="0"/>
             <a:r>
-              <a:rPr lang="ko-KR" altLang="en-US" smtClean="0"/>
+              <a:rPr lang="ko-KR" altLang="en-US"/>
               <a:t>마스터 텍스트 스타일 편집</a:t>
             </a:r>
           </a:p>
           <a:p>
             <a:pPr lvl="1"/>
             <a:r>
-              <a:rPr lang="ko-KR" altLang="en-US" smtClean="0"/>
+              <a:rPr lang="ko-KR" altLang="en-US"/>
               <a:t>둘째 수준</a:t>
             </a:r>
           </a:p>
           <a:p>
             <a:pPr lvl="2"/>
             <a:r>
-              <a:rPr lang="ko-KR" altLang="en-US" smtClean="0"/>
+              <a:rPr lang="ko-KR" altLang="en-US"/>
               <a:t>셋째 수준</a:t>
             </a:r>
           </a:p>
           <a:p>
             <a:pPr lvl="3"/>
             <a:r>
-              <a:rPr lang="ko-KR" altLang="en-US" smtClean="0"/>
+              <a:rPr lang="ko-KR" altLang="en-US"/>
               <a:t>넷째 수준</a:t>
             </a:r>
           </a:p>
           <a:p>
             <a:pPr lvl="4"/>
             <a:r>
-              <a:rPr lang="ko-KR" altLang="en-US" smtClean="0"/>
+              <a:rPr lang="ko-KR" altLang="en-US"/>
               <a:t>다섯째 수준</a:t>
             </a:r>
-            <a:endParaRPr lang="ko-KR" altLang="en-US"/>
           </a:p>
         </p:txBody>
       </p:sp>
@@ -1631,7 +1711,7 @@
           <a:p>
             <a:fld id="{8749EECF-A286-4451-B3E5-D3206A380227}" type="datetimeFigureOut">
               <a:rPr lang="ko-KR" altLang="en-US" smtClean="0"/>
-              <a:t>2026-07-01</a:t>
+              <a:t>2026-07-02</a:t>
             </a:fld>
             <a:endParaRPr lang="ko-KR" altLang="en-US"/>
           </a:p>
@@ -1725,10 +1805,9 @@
           <a:lstStyle/>
           <a:p>
             <a:r>
-              <a:rPr lang="ko-KR" altLang="en-US" smtClean="0"/>
+              <a:rPr lang="ko-KR" altLang="en-US"/>
               <a:t>마스터 제목 스타일 편집</a:t>
             </a:r>
-            <a:endParaRPr lang="ko-KR" altLang="en-US"/>
           </a:p>
         </p:txBody>
       </p:sp>
@@ -1749,7 +1828,7 @@
           <a:p>
             <a:fld id="{8749EECF-A286-4451-B3E5-D3206A380227}" type="datetimeFigureOut">
               <a:rPr lang="ko-KR" altLang="en-US" smtClean="0"/>
-              <a:t>2026-07-01</a:t>
+              <a:t>2026-07-02</a:t>
             </a:fld>
             <a:endParaRPr lang="ko-KR" altLang="en-US"/>
           </a:p>
@@ -1844,7 +1923,7 @@
           <a:p>
             <a:fld id="{8749EECF-A286-4451-B3E5-D3206A380227}" type="datetimeFigureOut">
               <a:rPr lang="ko-KR" altLang="en-US" smtClean="0"/>
-              <a:t>2026-07-01</a:t>
+              <a:t>2026-07-02</a:t>
             </a:fld>
             <a:endParaRPr lang="ko-KR" altLang="en-US"/>
           </a:p>
@@ -1947,10 +2026,9 @@
           </a:lstStyle>
           <a:p>
             <a:r>
-              <a:rPr lang="ko-KR" altLang="en-US" smtClean="0"/>
+              <a:rPr lang="ko-KR" altLang="en-US"/>
               <a:t>마스터 제목 스타일 편집</a:t>
             </a:r>
-            <a:endParaRPr lang="ko-KR" altLang="en-US"/>
           </a:p>
         </p:txBody>
       </p:sp>
@@ -2004,38 +2082,37 @@
           <a:p>
             <a:pPr lvl="0"/>
             <a:r>
-              <a:rPr lang="ko-KR" altLang="en-US" smtClean="0"/>
+              <a:rPr lang="ko-KR" altLang="en-US"/>
               <a:t>마스터 텍스트 스타일 편집</a:t>
             </a:r>
           </a:p>
           <a:p>
             <a:pPr lvl="1"/>
             <a:r>
-              <a:rPr lang="ko-KR" altLang="en-US" smtClean="0"/>
+              <a:rPr lang="ko-KR" altLang="en-US"/>
               <a:t>둘째 수준</a:t>
             </a:r>
           </a:p>
           <a:p>
             <a:pPr lvl="2"/>
             <a:r>
-              <a:rPr lang="ko-KR" altLang="en-US" smtClean="0"/>
+              <a:rPr lang="ko-KR" altLang="en-US"/>
               <a:t>셋째 수준</a:t>
             </a:r>
           </a:p>
           <a:p>
             <a:pPr lvl="3"/>
             <a:r>
-              <a:rPr lang="ko-KR" altLang="en-US" smtClean="0"/>
+              <a:rPr lang="ko-KR" altLang="en-US"/>
               <a:t>넷째 수준</a:t>
             </a:r>
           </a:p>
           <a:p>
             <a:pPr lvl="4"/>
             <a:r>
-              <a:rPr lang="ko-KR" altLang="en-US" smtClean="0"/>
+              <a:rPr lang="ko-KR" altLang="en-US"/>
               <a:t>다섯째 수준</a:t>
             </a:r>
-            <a:endParaRPr lang="ko-KR" altLang="en-US"/>
           </a:p>
         </p:txBody>
       </p:sp>
@@ -2098,7 +2175,7 @@
           <a:p>
             <a:pPr lvl="0"/>
             <a:r>
-              <a:rPr lang="ko-KR" altLang="en-US" smtClean="0"/>
+              <a:rPr lang="ko-KR" altLang="en-US"/>
               <a:t>마스터 텍스트 스타일 편집</a:t>
             </a:r>
           </a:p>
@@ -2121,7 +2198,7 @@
           <a:p>
             <a:fld id="{8749EECF-A286-4451-B3E5-D3206A380227}" type="datetimeFigureOut">
               <a:rPr lang="ko-KR" altLang="en-US" smtClean="0"/>
-              <a:t>2026-07-01</a:t>
+              <a:t>2026-07-02</a:t>
             </a:fld>
             <a:endParaRPr lang="ko-KR" altLang="en-US"/>
           </a:p>
@@ -2224,10 +2301,9 @@
           </a:lstStyle>
           <a:p>
             <a:r>
-              <a:rPr lang="ko-KR" altLang="en-US" smtClean="0"/>
+              <a:rPr lang="ko-KR" altLang="en-US"/>
               <a:t>마스터 제목 스타일 편집</a:t>
             </a:r>
-            <a:endParaRPr lang="ko-KR" altLang="en-US"/>
           </a:p>
         </p:txBody>
       </p:sp>
@@ -2351,7 +2427,7 @@
           <a:p>
             <a:pPr lvl="0"/>
             <a:r>
-              <a:rPr lang="ko-KR" altLang="en-US" smtClean="0"/>
+              <a:rPr lang="ko-KR" altLang="en-US"/>
               <a:t>마스터 텍스트 스타일 편집</a:t>
             </a:r>
           </a:p>
@@ -2374,7 +2450,7 @@
           <a:p>
             <a:fld id="{8749EECF-A286-4451-B3E5-D3206A380227}" type="datetimeFigureOut">
               <a:rPr lang="ko-KR" altLang="en-US" smtClean="0"/>
-              <a:t>2026-07-01</a:t>
+              <a:t>2026-07-02</a:t>
             </a:fld>
             <a:endParaRPr lang="ko-KR" altLang="en-US"/>
           </a:p>
@@ -2483,10 +2559,9 @@
           <a:lstStyle/>
           <a:p>
             <a:r>
-              <a:rPr lang="ko-KR" altLang="en-US" smtClean="0"/>
+              <a:rPr lang="ko-KR" altLang="en-US"/>
               <a:t>마스터 제목 스타일 편집</a:t>
             </a:r>
-            <a:endParaRPr lang="ko-KR" altLang="en-US"/>
           </a:p>
         </p:txBody>
       </p:sp>
@@ -2517,38 +2592,37 @@
           <a:p>
             <a:pPr lvl="0"/>
             <a:r>
-              <a:rPr lang="ko-KR" altLang="en-US" smtClean="0"/>
+              <a:rPr lang="ko-KR" altLang="en-US"/>
               <a:t>마스터 텍스트 스타일 편집</a:t>
             </a:r>
           </a:p>
           <a:p>
             <a:pPr lvl="1"/>
             <a:r>
-              <a:rPr lang="ko-KR" altLang="en-US" smtClean="0"/>
+              <a:rPr lang="ko-KR" altLang="en-US"/>
               <a:t>둘째 수준</a:t>
             </a:r>
           </a:p>
           <a:p>
             <a:pPr lvl="2"/>
             <a:r>
-              <a:rPr lang="ko-KR" altLang="en-US" smtClean="0"/>
+              <a:rPr lang="ko-KR" altLang="en-US"/>
               <a:t>셋째 수준</a:t>
             </a:r>
           </a:p>
           <a:p>
             <a:pPr lvl="3"/>
             <a:r>
-              <a:rPr lang="ko-KR" altLang="en-US" smtClean="0"/>
+              <a:rPr lang="ko-KR" altLang="en-US"/>
               <a:t>넷째 수준</a:t>
             </a:r>
           </a:p>
           <a:p>
             <a:pPr lvl="4"/>
             <a:r>
-              <a:rPr lang="ko-KR" altLang="en-US" smtClean="0"/>
+              <a:rPr lang="ko-KR" altLang="en-US"/>
               <a:t>다섯째 수준</a:t>
             </a:r>
-            <a:endParaRPr lang="ko-KR" altLang="en-US"/>
           </a:p>
         </p:txBody>
       </p:sp>
@@ -2587,7 +2661,7 @@
           <a:p>
             <a:fld id="{8749EECF-A286-4451-B3E5-D3206A380227}" type="datetimeFigureOut">
               <a:rPr lang="ko-KR" altLang="en-US" smtClean="0"/>
-              <a:t>2026-07-01</a:t>
+              <a:t>2026-07-02</a:t>
             </a:fld>
             <a:endParaRPr lang="ko-KR" altLang="en-US"/>
           </a:p>
@@ -3008,18 +3082,17 @@
           <a:lstStyle/>
           <a:p>
             <a:r>
-              <a:rPr lang="ko-KR" altLang="en-US" smtClean="0"/>
+              <a:rPr lang="ko-KR" altLang="en-US"/>
               <a:t>배경 구조물 </a:t>
             </a:r>
             <a:r>
-              <a:rPr lang="en-US" altLang="ko-KR" smtClean="0"/>
+              <a:rPr lang="en-US" altLang="ko-KR"/>
               <a:t>– </a:t>
             </a:r>
             <a:r>
-              <a:rPr lang="ko-KR" altLang="en-US" smtClean="0"/>
+              <a:rPr lang="ko-KR" altLang="en-US"/>
               <a:t>배경 모델러들</a:t>
             </a:r>
-            <a:endParaRPr lang="ko-KR" altLang="en-US"/>
           </a:p>
         </p:txBody>
       </p:sp>
@@ -3039,63 +3112,77 @@
           <a:lstStyle/>
           <a:p>
             <a:r>
-              <a:rPr lang="ko-KR" altLang="en-US" smtClean="0"/>
+              <a:rPr lang="ko-KR" altLang="en-US" dirty="0"/>
               <a:t>연출에 대한 부분도 생각해보기</a:t>
             </a:r>
-            <a:endParaRPr lang="en-US" altLang="ko-KR" smtClean="0"/>
+            <a:endParaRPr lang="en-US" altLang="ko-KR" dirty="0"/>
           </a:p>
           <a:p>
             <a:pPr lvl="1"/>
             <a:r>
-              <a:rPr lang="ko-KR" altLang="en-US" smtClean="0"/>
-              <a:t>이렇게 커다란 문이 이 작동 장치에 의해서 열린다구</a:t>
-            </a:r>
-            <a:r>
-              <a:rPr lang="en-US" altLang="ko-KR" smtClean="0"/>
+              <a:rPr lang="ko-KR" altLang="en-US" dirty="0"/>
+              <a:t>이렇게 커다란 문이 이 작동 장치에 의해서 </a:t>
+            </a:r>
+            <a:r>
+              <a:rPr lang="ko-KR" altLang="en-US" dirty="0" err="1"/>
+              <a:t>열린다구</a:t>
+            </a:r>
+            <a:r>
+              <a:rPr lang="en-US" altLang="ko-KR" dirty="0"/>
               <a:t>?</a:t>
             </a:r>
           </a:p>
           <a:p>
             <a:pPr lvl="1"/>
             <a:r>
-              <a:rPr lang="ko-KR" altLang="en-US" smtClean="0"/>
-              <a:t>문이 열리면서 빛이 안에서 새어나온다구</a:t>
-            </a:r>
-            <a:r>
-              <a:rPr lang="en-US" altLang="ko-KR" smtClean="0"/>
+              <a:rPr lang="ko-KR" altLang="en-US" dirty="0"/>
+              <a:t>문이 열리면서 빛이 안에서 </a:t>
+            </a:r>
+            <a:r>
+              <a:rPr lang="ko-KR" altLang="en-US" dirty="0" err="1"/>
+              <a:t>새어나온다구</a:t>
+            </a:r>
+            <a:r>
+              <a:rPr lang="en-US" altLang="ko-KR" dirty="0"/>
               <a:t>?</a:t>
             </a:r>
-            <a:endParaRPr lang="en-US" altLang="ko-KR"/>
-          </a:p>
-          <a:p>
-            <a:r>
-              <a:rPr lang="ko-KR" altLang="en-US" smtClean="0"/>
+          </a:p>
+          <a:p>
+            <a:r>
+              <a:rPr lang="ko-KR" altLang="en-US" dirty="0"/>
               <a:t>문제</a:t>
             </a:r>
             <a:r>
-              <a:rPr lang="en-US" altLang="ko-KR" smtClean="0"/>
+              <a:rPr lang="en-US" altLang="ko-KR" dirty="0"/>
               <a:t>(</a:t>
             </a:r>
             <a:r>
-              <a:rPr lang="ko-KR" altLang="en-US" smtClean="0"/>
+              <a:rPr lang="ko-KR" altLang="en-US" dirty="0"/>
               <a:t>퍼즐</a:t>
             </a:r>
             <a:r>
-              <a:rPr lang="en-US" altLang="ko-KR" smtClean="0"/>
+              <a:rPr lang="en-US" altLang="ko-KR" dirty="0"/>
               <a:t>)</a:t>
             </a:r>
             <a:r>
-              <a:rPr lang="ko-KR" altLang="en-US" smtClean="0"/>
+              <a:rPr lang="ko-KR" altLang="en-US" dirty="0"/>
               <a:t>의 유형을 배경 구조물에 대입해보기</a:t>
             </a:r>
-            <a:endParaRPr lang="en-US" altLang="ko-KR" smtClean="0"/>
-          </a:p>
-          <a:p>
-            <a:r>
-              <a:rPr lang="ko-KR" altLang="en-US" smtClean="0"/>
-              <a:t>라이브러리로 만들어져있는 것을 그 상황을 재연해보기</a:t>
-            </a:r>
-            <a:endParaRPr lang="ko-KR" altLang="en-US"/>
+            <a:endParaRPr lang="en-US" altLang="ko-KR" dirty="0"/>
+          </a:p>
+          <a:p>
+            <a:r>
+              <a:rPr lang="ko-KR" altLang="en-US" dirty="0"/>
+              <a:t>라이브러리로 </a:t>
+            </a:r>
+            <a:r>
+              <a:rPr lang="ko-KR" altLang="en-US" dirty="0" err="1"/>
+              <a:t>만들어져있는</a:t>
+            </a:r>
+            <a:r>
+              <a:rPr lang="ko-KR" altLang="en-US" dirty="0"/>
+              <a:t> 것을 그 상황을 재연해보기</a:t>
+            </a:r>
           </a:p>
         </p:txBody>
       </p:sp>
@@ -3173,15 +3260,15 @@
               <a:buAutoNum type="arabicPeriod"/>
             </a:pPr>
             <a:r>
-              <a:rPr lang="ko-KR" altLang="en-US" smtClean="0"/>
+              <a:rPr lang="ko-KR" altLang="en-US"/>
               <a:t>손맛을 제일 잘 만드는 회사 </a:t>
             </a:r>
             <a:r>
-              <a:rPr lang="en-US" altLang="ko-KR" smtClean="0"/>
+              <a:rPr lang="en-US" altLang="ko-KR"/>
               <a:t>=&gt; </a:t>
             </a:r>
             <a:r>
-              <a:rPr lang="ko-KR" altLang="en-US" smtClean="0"/>
+              <a:rPr lang="ko-KR" altLang="en-US"/>
               <a:t>닌텐도</a:t>
             </a:r>
             <a:endParaRPr lang="en-US" altLang="ko-KR"/>
@@ -3189,46 +3276,46 @@
           <a:p>
             <a:pPr lvl="1"/>
             <a:r>
-              <a:rPr lang="ko-KR" altLang="en-US" smtClean="0"/>
+              <a:rPr lang="ko-KR" altLang="en-US"/>
               <a:t>폴리싱 작업 </a:t>
             </a:r>
             <a:r>
-              <a:rPr lang="en-US" altLang="ko-KR" smtClean="0"/>
+              <a:rPr lang="en-US" altLang="ko-KR"/>
               <a:t>: </a:t>
             </a:r>
             <a:r>
-              <a:rPr lang="ko-KR" altLang="en-US" smtClean="0"/>
+              <a:rPr lang="ko-KR" altLang="en-US"/>
               <a:t>키보드</a:t>
             </a:r>
             <a:r>
-              <a:rPr lang="en-US" altLang="ko-KR" smtClean="0"/>
+              <a:rPr lang="en-US" altLang="ko-KR"/>
               <a:t>.</a:t>
             </a:r>
             <a:r>
-              <a:rPr lang="ko-KR" altLang="en-US" smtClean="0"/>
+              <a:rPr lang="ko-KR" altLang="en-US"/>
               <a:t>마우스</a:t>
             </a:r>
             <a:r>
-              <a:rPr lang="en-US" altLang="ko-KR" smtClean="0"/>
+              <a:rPr lang="en-US" altLang="ko-KR"/>
               <a:t>.</a:t>
             </a:r>
             <a:r>
-              <a:rPr lang="ko-KR" altLang="en-US" smtClean="0"/>
+              <a:rPr lang="ko-KR" altLang="en-US"/>
               <a:t>패드가 닳도록 테스트하는 작업</a:t>
             </a:r>
             <a:r>
-              <a:rPr lang="en-US" altLang="ko-KR" smtClean="0"/>
+              <a:rPr lang="en-US" altLang="ko-KR"/>
               <a:t>.</a:t>
             </a:r>
             <a:br>
-              <a:rPr lang="en-US" altLang="ko-KR" smtClean="0"/>
+              <a:rPr lang="en-US" altLang="ko-KR"/>
             </a:br>
             <a:r>
-              <a:rPr lang="ko-KR" altLang="en-US" smtClean="0"/>
+              <a:rPr lang="ko-KR" altLang="en-US"/>
               <a:t>손맛을 다듬는 작업</a:t>
             </a:r>
             <a:r>
-              <a:rPr lang="en-US" altLang="ko-KR" smtClean="0"/>
+              <a:rPr lang="en-US" altLang="ko-KR"/>
               <a:t>.</a:t>
             </a:r>
           </a:p>
@@ -3237,7 +3324,7 @@
               <a:buFont typeface="+mj-lt"/>
               <a:buAutoNum type="arabicPeriod"/>
             </a:pPr>
-            <a:endParaRPr lang="en-US" altLang="ko-KR" smtClean="0"/>
+            <a:endParaRPr lang="en-US" altLang="ko-KR"/>
           </a:p>
           <a:p>
             <a:pPr marL="514350" indent="-514350">
@@ -3245,65 +3332,64 @@
               <a:buAutoNum type="arabicPeriod"/>
             </a:pPr>
             <a:r>
-              <a:rPr lang="ko-KR" altLang="en-US" smtClean="0"/>
+              <a:rPr lang="ko-KR" altLang="en-US"/>
               <a:t>스토리텔링 경험</a:t>
             </a:r>
-            <a:endParaRPr lang="en-US" altLang="ko-KR" smtClean="0"/>
+            <a:endParaRPr lang="en-US" altLang="ko-KR"/>
           </a:p>
           <a:p>
             <a:pPr lvl="1"/>
             <a:r>
-              <a:rPr lang="ko-KR" altLang="en-US" smtClean="0"/>
+              <a:rPr lang="ko-KR" altLang="en-US"/>
               <a:t>시네마틱</a:t>
             </a:r>
             <a:r>
-              <a:rPr lang="en-US" altLang="ko-KR" smtClean="0"/>
+              <a:rPr lang="en-US" altLang="ko-KR"/>
               <a:t>(</a:t>
             </a:r>
             <a:r>
-              <a:rPr lang="ko-KR" altLang="en-US" smtClean="0"/>
+              <a:rPr lang="ko-KR" altLang="en-US"/>
               <a:t>영화같은 장면</a:t>
             </a:r>
             <a:r>
-              <a:rPr lang="en-US" altLang="ko-KR" smtClean="0"/>
+              <a:rPr lang="en-US" altLang="ko-KR"/>
               <a:t>)</a:t>
             </a:r>
             <a:r>
-              <a:rPr lang="ko-KR" altLang="en-US" smtClean="0"/>
+              <a:rPr lang="ko-KR" altLang="en-US"/>
               <a:t>을 얼마나 상상할 수 있는가</a:t>
             </a:r>
-            <a:endParaRPr lang="en-US" altLang="ko-KR" smtClean="0"/>
+            <a:endParaRPr lang="en-US" altLang="ko-KR"/>
           </a:p>
           <a:p>
             <a:pPr lvl="1"/>
             <a:r>
-              <a:rPr lang="ko-KR" altLang="en-US" smtClean="0"/>
+              <a:rPr lang="ko-KR" altLang="en-US"/>
               <a:t>캐릭터</a:t>
             </a:r>
             <a:r>
-              <a:rPr lang="en-US" altLang="ko-KR" smtClean="0"/>
+              <a:rPr lang="en-US" altLang="ko-KR"/>
               <a:t>.</a:t>
             </a:r>
             <a:r>
-              <a:rPr lang="ko-KR" altLang="en-US" smtClean="0"/>
+              <a:rPr lang="ko-KR" altLang="en-US"/>
               <a:t>아이템같은 배경의 소품들이 준비되어 있어야 한다</a:t>
             </a:r>
             <a:r>
-              <a:rPr lang="en-US" altLang="ko-KR" smtClean="0"/>
+              <a:rPr lang="en-US" altLang="ko-KR"/>
               <a:t>.</a:t>
             </a:r>
           </a:p>
           <a:p>
             <a:pPr lvl="1"/>
             <a:r>
-              <a:rPr lang="ko-KR" altLang="en-US" smtClean="0"/>
+              <a:rPr lang="ko-KR" altLang="en-US"/>
               <a:t>단순히 글자 정보가 아니라</a:t>
             </a:r>
             <a:r>
-              <a:rPr lang="en-US" altLang="ko-KR" smtClean="0"/>
+              <a:rPr lang="en-US" altLang="ko-KR"/>
               <a:t>.</a:t>
             </a:r>
-            <a:endParaRPr lang="en-US" altLang="ko-KR"/>
           </a:p>
           <a:p>
             <a:pPr marL="514350" indent="-514350">
@@ -3340,14 +3426,13 @@
           <a:lstStyle/>
           <a:p>
             <a:r>
-              <a:rPr lang="ko-KR" altLang="en-US" sz="3200" smtClean="0"/>
+              <a:rPr lang="ko-KR" altLang="en-US" sz="3200"/>
               <a:t>뭐가 재밌지</a:t>
             </a:r>
             <a:r>
-              <a:rPr lang="en-US" altLang="ko-KR" sz="3200" smtClean="0"/>
+              <a:rPr lang="en-US" altLang="ko-KR" sz="3200"/>
               <a:t>?</a:t>
             </a:r>
-            <a:endParaRPr lang="en-US" altLang="ko-KR" sz="3200" smtClean="0"/>
           </a:p>
         </p:txBody>
       </p:sp>
@@ -3355,351 +3440,6 @@
     <p:extLst>
       <p:ext uri="{BB962C8B-B14F-4D97-AF65-F5344CB8AC3E}">
         <p14:creationId xmlns:p14="http://schemas.microsoft.com/office/powerpoint/2010/main" val="1128253775"/>
-      </p:ext>
-    </p:extLst>
-  </p:cSld>
-  <p:clrMapOvr>
-    <a:masterClrMapping/>
-  </p:clrMapOvr>
-</p:sld>
-</file>
-
-<file path=ppt/slides/slide11.xml><?xml version="1.0" encoding="utf-8"?>
-<p:sld xmlns:a="http://schemas.openxmlformats.org/drawingml/2006/main" xmlns:r="http://schemas.openxmlformats.org/officeDocument/2006/relationships" xmlns:p="http://schemas.openxmlformats.org/presentationml/2006/main">
-  <p:cSld>
-    <p:spTree>
-      <p:nvGrpSpPr>
-        <p:cNvPr id="1" name=""/>
-        <p:cNvGrpSpPr/>
-        <p:nvPr/>
-      </p:nvGrpSpPr>
-      <p:grpSpPr>
-        <a:xfrm>
-          <a:off x="0" y="0"/>
-          <a:ext cx="0" cy="0"/>
-          <a:chOff x="0" y="0"/>
-          <a:chExt cx="0" cy="0"/>
-        </a:xfrm>
-      </p:grpSpPr>
-      <p:sp>
-        <p:nvSpPr>
-          <p:cNvPr id="3" name="내용 개체 틀 2"/>
-          <p:cNvSpPr>
-            <a:spLocks noGrp="1"/>
-          </p:cNvSpPr>
-          <p:nvPr>
-            <p:ph idx="1"/>
-          </p:nvPr>
-        </p:nvSpPr>
-        <p:spPr/>
-        <p:txBody>
-          <a:bodyPr/>
-          <a:lstStyle/>
-          <a:p>
-            <a:endParaRPr lang="ko-KR" altLang="en-US"/>
-          </a:p>
-        </p:txBody>
-      </p:sp>
-      <p:sp>
-        <p:nvSpPr>
-          <p:cNvPr id="4" name="제목 1"/>
-          <p:cNvSpPr>
-            <a:spLocks noGrp="1"/>
-          </p:cNvSpPr>
-          <p:nvPr>
-            <p:ph type="title"/>
-          </p:nvPr>
-        </p:nvSpPr>
-        <p:spPr>
-          <a:xfrm>
-            <a:off x="838200" y="365125"/>
-            <a:ext cx="10515600" cy="1325563"/>
-          </a:xfrm>
-        </p:spPr>
-        <p:txBody>
-          <a:bodyPr>
-            <a:normAutofit/>
-          </a:bodyPr>
-          <a:lstStyle/>
-          <a:p>
-            <a:r>
-              <a:rPr lang="en-US" altLang="ko-KR" sz="3200" smtClean="0"/>
-              <a:t>[</a:t>
-            </a:r>
-            <a:r>
-              <a:rPr lang="ko-KR" altLang="en-US" sz="3200" smtClean="0"/>
-              <a:t>언차티드</a:t>
-            </a:r>
-            <a:r>
-              <a:rPr lang="en-US" altLang="ko-KR" sz="3200" smtClean="0"/>
-              <a:t>4</a:t>
-            </a:r>
-            <a:r>
-              <a:rPr lang="ko-KR" altLang="en-US" sz="3200" smtClean="0"/>
-              <a:t>챕터</a:t>
-            </a:r>
-            <a:r>
-              <a:rPr lang="en-US" altLang="ko-KR" sz="3200" smtClean="0"/>
-              <a:t>1 </a:t>
-            </a:r>
-            <a:r>
-              <a:rPr lang="ko-KR" altLang="en-US" sz="3200" smtClean="0"/>
-              <a:t>모험의 유혹</a:t>
-            </a:r>
-            <a:r>
-              <a:rPr lang="en-US" altLang="ko-KR" sz="3200" smtClean="0"/>
-              <a:t>(</a:t>
-            </a:r>
-            <a:r>
-              <a:rPr lang="ko-KR" altLang="en-US" sz="3200" smtClean="0"/>
-              <a:t>매우 어려움</a:t>
-            </a:r>
-            <a:r>
-              <a:rPr lang="en-US" altLang="ko-KR" sz="3200" smtClean="0"/>
-              <a:t>)] – 4:15</a:t>
-            </a:r>
-            <a:r>
-              <a:rPr lang="ko-KR" altLang="en-US" sz="3200" smtClean="0"/>
-              <a:t>부터</a:t>
-            </a:r>
-            <a:endParaRPr lang="en-US" altLang="ko-KR" sz="3200" smtClean="0"/>
-          </a:p>
-        </p:txBody>
-      </p:sp>
-    </p:spTree>
-    <p:extLst>
-      <p:ext uri="{BB962C8B-B14F-4D97-AF65-F5344CB8AC3E}">
-        <p14:creationId xmlns:p14="http://schemas.microsoft.com/office/powerpoint/2010/main" val="1106946743"/>
-      </p:ext>
-    </p:extLst>
-  </p:cSld>
-  <p:clrMapOvr>
-    <a:masterClrMapping/>
-  </p:clrMapOvr>
-</p:sld>
-</file>
-
-<file path=ppt/slides/slide12.xml><?xml version="1.0" encoding="utf-8"?>
-<p:sld xmlns:a="http://schemas.openxmlformats.org/drawingml/2006/main" xmlns:r="http://schemas.openxmlformats.org/officeDocument/2006/relationships" xmlns:p="http://schemas.openxmlformats.org/presentationml/2006/main">
-  <p:cSld>
-    <p:spTree>
-      <p:nvGrpSpPr>
-        <p:cNvPr id="1" name=""/>
-        <p:cNvGrpSpPr/>
-        <p:nvPr/>
-      </p:nvGrpSpPr>
-      <p:grpSpPr>
-        <a:xfrm>
-          <a:off x="0" y="0"/>
-          <a:ext cx="0" cy="0"/>
-          <a:chOff x="0" y="0"/>
-          <a:chExt cx="0" cy="0"/>
-        </a:xfrm>
-      </p:grpSpPr>
-      <p:sp>
-        <p:nvSpPr>
-          <p:cNvPr id="3" name="내용 개체 틀 2"/>
-          <p:cNvSpPr>
-            <a:spLocks noGrp="1"/>
-          </p:cNvSpPr>
-          <p:nvPr>
-            <p:ph idx="1"/>
-          </p:nvPr>
-        </p:nvSpPr>
-        <p:spPr/>
-        <p:txBody>
-          <a:bodyPr/>
-          <a:lstStyle/>
-          <a:p>
-            <a:endParaRPr lang="ko-KR" altLang="en-US"/>
-          </a:p>
-        </p:txBody>
-      </p:sp>
-      <p:sp>
-        <p:nvSpPr>
-          <p:cNvPr id="4" name="제목 1"/>
-          <p:cNvSpPr>
-            <a:spLocks noGrp="1"/>
-          </p:cNvSpPr>
-          <p:nvPr>
-            <p:ph type="title"/>
-          </p:nvPr>
-        </p:nvSpPr>
-        <p:spPr>
-          <a:xfrm>
-            <a:off x="838200" y="365125"/>
-            <a:ext cx="10515600" cy="1325563"/>
-          </a:xfrm>
-        </p:spPr>
-        <p:txBody>
-          <a:bodyPr>
-            <a:normAutofit/>
-          </a:bodyPr>
-          <a:lstStyle/>
-          <a:p>
-            <a:r>
-              <a:rPr lang="en-US" altLang="ko-KR" sz="3200" smtClean="0"/>
-              <a:t>[</a:t>
-            </a:r>
-            <a:r>
-              <a:rPr lang="ko-KR" altLang="en-US" sz="3200" smtClean="0"/>
-              <a:t>언차티드</a:t>
-            </a:r>
-            <a:r>
-              <a:rPr lang="en-US" altLang="ko-KR" sz="3200" smtClean="0"/>
-              <a:t>4</a:t>
-            </a:r>
-            <a:r>
-              <a:rPr lang="ko-KR" altLang="en-US" sz="3200" smtClean="0"/>
-              <a:t>챕터</a:t>
-            </a:r>
-            <a:r>
-              <a:rPr lang="en-US" altLang="ko-KR" sz="3200" smtClean="0"/>
-              <a:t>1 </a:t>
-            </a:r>
-            <a:r>
-              <a:rPr lang="ko-KR" altLang="en-US" sz="3200" smtClean="0"/>
-              <a:t>모험의 유혹</a:t>
-            </a:r>
-            <a:r>
-              <a:rPr lang="en-US" altLang="ko-KR" sz="3200" smtClean="0"/>
-              <a:t>(</a:t>
-            </a:r>
-            <a:r>
-              <a:rPr lang="ko-KR" altLang="en-US" sz="3200" smtClean="0"/>
-              <a:t>매우 어려움</a:t>
-            </a:r>
-            <a:r>
-              <a:rPr lang="en-US" altLang="ko-KR" sz="3200" smtClean="0"/>
-              <a:t>)] – 4:15</a:t>
-            </a:r>
-            <a:r>
-              <a:rPr lang="ko-KR" altLang="en-US" sz="3200" smtClean="0"/>
-              <a:t>부터</a:t>
-            </a:r>
-            <a:endParaRPr lang="en-US" altLang="ko-KR" sz="3200" smtClean="0"/>
-          </a:p>
-        </p:txBody>
-      </p:sp>
-    </p:spTree>
-    <p:extLst>
-      <p:ext uri="{BB962C8B-B14F-4D97-AF65-F5344CB8AC3E}">
-        <p14:creationId xmlns:p14="http://schemas.microsoft.com/office/powerpoint/2010/main" val="2282664298"/>
-      </p:ext>
-    </p:extLst>
-  </p:cSld>
-  <p:clrMapOvr>
-    <a:masterClrMapping/>
-  </p:clrMapOvr>
-</p:sld>
-</file>
-
-<file path=ppt/slides/slide13.xml><?xml version="1.0" encoding="utf-8"?>
-<p:sld xmlns:a="http://schemas.openxmlformats.org/drawingml/2006/main" xmlns:r="http://schemas.openxmlformats.org/officeDocument/2006/relationships" xmlns:p="http://schemas.openxmlformats.org/presentationml/2006/main">
-  <p:cSld>
-    <p:spTree>
-      <p:nvGrpSpPr>
-        <p:cNvPr id="1" name=""/>
-        <p:cNvGrpSpPr/>
-        <p:nvPr/>
-      </p:nvGrpSpPr>
-      <p:grpSpPr>
-        <a:xfrm>
-          <a:off x="0" y="0"/>
-          <a:ext cx="0" cy="0"/>
-          <a:chOff x="0" y="0"/>
-          <a:chExt cx="0" cy="0"/>
-        </a:xfrm>
-      </p:grpSpPr>
-      <p:sp>
-        <p:nvSpPr>
-          <p:cNvPr id="3" name="내용 개체 틀 2"/>
-          <p:cNvSpPr>
-            <a:spLocks noGrp="1"/>
-          </p:cNvSpPr>
-          <p:nvPr>
-            <p:ph idx="1"/>
-          </p:nvPr>
-        </p:nvSpPr>
-        <p:spPr/>
-        <p:txBody>
-          <a:bodyPr/>
-          <a:lstStyle/>
-          <a:p>
-            <a:endParaRPr lang="ko-KR" altLang="en-US"/>
-          </a:p>
-        </p:txBody>
-      </p:sp>
-      <p:sp>
-        <p:nvSpPr>
-          <p:cNvPr id="4" name="제목 1"/>
-          <p:cNvSpPr>
-            <a:spLocks noGrp="1"/>
-          </p:cNvSpPr>
-          <p:nvPr>
-            <p:ph type="title"/>
-          </p:nvPr>
-        </p:nvSpPr>
-        <p:spPr>
-          <a:xfrm>
-            <a:off x="838200" y="365125"/>
-            <a:ext cx="10515600" cy="1325563"/>
-          </a:xfrm>
-        </p:spPr>
-        <p:txBody>
-          <a:bodyPr>
-            <a:normAutofit/>
-          </a:bodyPr>
-          <a:lstStyle/>
-          <a:p>
-            <a:r>
-              <a:rPr lang="en-US" altLang="ko-KR" sz="3200" smtClean="0"/>
-              <a:t>[</a:t>
-            </a:r>
-            <a:r>
-              <a:rPr lang="ko-KR" altLang="en-US" sz="3200" smtClean="0"/>
-              <a:t>언차티드</a:t>
-            </a:r>
-            <a:r>
-              <a:rPr lang="en-US" altLang="ko-KR" sz="3200" smtClean="0"/>
-              <a:t>4</a:t>
-            </a:r>
-            <a:r>
-              <a:rPr lang="ko-KR" altLang="en-US" sz="3200" smtClean="0"/>
-              <a:t>챕터</a:t>
-            </a:r>
-            <a:r>
-              <a:rPr lang="en-US" altLang="ko-KR" sz="3200" smtClean="0"/>
-              <a:t>1 </a:t>
-            </a:r>
-            <a:r>
-              <a:rPr lang="ko-KR" altLang="en-US" sz="3200" smtClean="0"/>
-              <a:t>모험의 유혹</a:t>
-            </a:r>
-            <a:r>
-              <a:rPr lang="en-US" altLang="ko-KR" sz="3200" smtClean="0"/>
-              <a:t>(</a:t>
-            </a:r>
-            <a:r>
-              <a:rPr lang="ko-KR" altLang="en-US" sz="3200" smtClean="0"/>
-              <a:t>매우 어려움</a:t>
-            </a:r>
-            <a:r>
-              <a:rPr lang="en-US" altLang="ko-KR" sz="3200" smtClean="0"/>
-              <a:t>)] – 4:15</a:t>
-            </a:r>
-            <a:r>
-              <a:rPr lang="ko-KR" altLang="en-US" sz="3200" smtClean="0"/>
-              <a:t>부터</a:t>
-            </a:r>
-            <a:endParaRPr lang="en-US" altLang="ko-KR" sz="3200" smtClean="0"/>
-          </a:p>
-        </p:txBody>
-      </p:sp>
-    </p:spTree>
-    <p:extLst>
-      <p:ext uri="{BB962C8B-B14F-4D97-AF65-F5344CB8AC3E}">
-        <p14:creationId xmlns:p14="http://schemas.microsoft.com/office/powerpoint/2010/main" val="3247853843"/>
       </p:ext>
     </p:extLst>
   </p:cSld>
@@ -3742,10 +3482,9 @@
           <a:lstStyle/>
           <a:p>
             <a:r>
-              <a:rPr lang="ko-KR" altLang="en-US" smtClean="0"/>
+              <a:rPr lang="ko-KR" altLang="en-US"/>
               <a:t>상호작용 구조물</a:t>
             </a:r>
-            <a:endParaRPr lang="ko-KR" altLang="en-US"/>
           </a:p>
         </p:txBody>
       </p:sp>
@@ -3765,19 +3504,19 @@
           <a:lstStyle/>
           <a:p>
             <a:r>
-              <a:rPr lang="ko-KR" altLang="en-US" smtClean="0"/>
+              <a:rPr lang="ko-KR" altLang="en-US"/>
               <a:t>포트폴리오에 </a:t>
             </a:r>
             <a:r>
-              <a:rPr lang="en-US" altLang="ko-KR" smtClean="0"/>
+              <a:rPr lang="en-US" altLang="ko-KR"/>
               <a:t>1</a:t>
             </a:r>
             <a:r>
-              <a:rPr lang="ko-KR" altLang="en-US" smtClean="0"/>
+              <a:rPr lang="ko-KR" altLang="en-US"/>
               <a:t>개 이상 제시해야 한다</a:t>
             </a:r>
             <a:r>
-              <a:rPr lang="en-US" altLang="ko-KR" smtClean="0"/>
+              <a:rPr lang="en-US" altLang="ko-KR"/>
               <a:t>.</a:t>
             </a:r>
             <a:endParaRPr lang="ko-KR" altLang="en-US"/>
@@ -3830,10 +3569,9 @@
           <a:lstStyle/>
           <a:p>
             <a:r>
-              <a:rPr lang="ko-KR" altLang="en-US" smtClean="0"/>
+              <a:rPr lang="ko-KR" altLang="en-US"/>
               <a:t>오늘 할 일</a:t>
             </a:r>
-            <a:endParaRPr lang="ko-KR" altLang="en-US"/>
           </a:p>
         </p:txBody>
       </p:sp>
@@ -3853,10 +3591,9 @@
           <a:lstStyle/>
           <a:p>
             <a:r>
-              <a:rPr lang="ko-KR" altLang="en-US" smtClean="0"/>
+              <a:rPr lang="ko-KR" altLang="en-US"/>
               <a:t>아이디어 스케치</a:t>
             </a:r>
-            <a:endParaRPr lang="ko-KR" altLang="en-US"/>
           </a:p>
         </p:txBody>
       </p:sp>
@@ -4175,10 +3912,9 @@
           <a:lstStyle/>
           <a:p>
             <a:r>
-              <a:rPr lang="ko-KR" altLang="en-US" smtClean="0"/>
+              <a:rPr lang="ko-KR" altLang="en-US"/>
               <a:t>색 참고</a:t>
             </a:r>
-            <a:endParaRPr lang="ko-KR" altLang="en-US"/>
           </a:p>
         </p:txBody>
       </p:sp>
@@ -4228,10 +3964,9 @@
           <a:lstStyle/>
           <a:p>
             <a:r>
-              <a:rPr lang="ko-KR" altLang="en-US" smtClean="0"/>
+              <a:rPr lang="ko-KR" altLang="en-US"/>
               <a:t>재미있는 퀘스트</a:t>
             </a:r>
-            <a:endParaRPr lang="ko-KR" altLang="en-US"/>
           </a:p>
         </p:txBody>
       </p:sp>
@@ -4251,26 +3986,26 @@
           <a:lstStyle/>
           <a:p>
             <a:r>
-              <a:rPr lang="ko-KR" altLang="en-US" smtClean="0"/>
+              <a:rPr lang="ko-KR" altLang="en-US"/>
               <a:t>사람마다 </a:t>
             </a:r>
             <a:r>
-              <a:rPr lang="en-US" altLang="ko-KR" smtClean="0"/>
+              <a:rPr lang="en-US" altLang="ko-KR"/>
               <a:t>/ </a:t>
             </a:r>
             <a:r>
-              <a:rPr lang="ko-KR" altLang="en-US" smtClean="0"/>
+              <a:rPr lang="ko-KR" altLang="en-US"/>
               <a:t>개발자와 유저의 시선이</a:t>
             </a:r>
-            <a:endParaRPr lang="en-US" altLang="ko-KR" smtClean="0"/>
-          </a:p>
-          <a:p>
-            <a:r>
-              <a:rPr lang="ko-KR" altLang="en-US" smtClean="0"/>
+            <a:endParaRPr lang="en-US" altLang="ko-KR"/>
+          </a:p>
+          <a:p>
+            <a:r>
+              <a:rPr lang="ko-KR" altLang="en-US"/>
               <a:t>많이 다르다</a:t>
             </a:r>
             <a:r>
-              <a:rPr lang="en-US" altLang="ko-KR" smtClean="0"/>
+              <a:rPr lang="en-US" altLang="ko-KR"/>
               <a:t>.</a:t>
             </a:r>
           </a:p>
@@ -4324,46 +4059,46 @@
           <a:lstStyle/>
           <a:p>
             <a:r>
-              <a:rPr lang="en-US" altLang="ko-KR" sz="3200" smtClean="0"/>
+              <a:rPr lang="en-US" altLang="ko-KR" sz="3200"/>
               <a:t>[</a:t>
             </a:r>
             <a:r>
-              <a:rPr lang="ko-KR" altLang="en-US" sz="3200" smtClean="0"/>
+              <a:rPr lang="ko-KR" altLang="en-US" sz="3200"/>
               <a:t>언차티드</a:t>
             </a:r>
             <a:r>
-              <a:rPr lang="en-US" altLang="ko-KR" sz="3200" smtClean="0"/>
+              <a:rPr lang="en-US" altLang="ko-KR" sz="3200"/>
               <a:t>4</a:t>
             </a:r>
             <a:r>
-              <a:rPr lang="ko-KR" altLang="en-US" sz="3200" smtClean="0"/>
+              <a:rPr lang="ko-KR" altLang="en-US" sz="3200"/>
               <a:t>챕터</a:t>
             </a:r>
             <a:r>
-              <a:rPr lang="en-US" altLang="ko-KR" sz="3200" smtClean="0"/>
+              <a:rPr lang="en-US" altLang="ko-KR" sz="3200"/>
               <a:t>1 </a:t>
             </a:r>
             <a:r>
-              <a:rPr lang="ko-KR" altLang="en-US" sz="3200" smtClean="0"/>
+              <a:rPr lang="ko-KR" altLang="en-US" sz="3200"/>
               <a:t>모험의 유혹</a:t>
             </a:r>
             <a:r>
-              <a:rPr lang="en-US" altLang="ko-KR" sz="3200" smtClean="0"/>
+              <a:rPr lang="en-US" altLang="ko-KR" sz="3200"/>
               <a:t>(</a:t>
             </a:r>
             <a:r>
-              <a:rPr lang="ko-KR" altLang="en-US" sz="3200" smtClean="0"/>
+              <a:rPr lang="ko-KR" altLang="en-US" sz="3200"/>
               <a:t>매우 어려움</a:t>
             </a:r>
             <a:r>
-              <a:rPr lang="en-US" altLang="ko-KR" sz="3200" smtClean="0"/>
+              <a:rPr lang="en-US" altLang="ko-KR" sz="3200"/>
               <a:t>)] – 4:15</a:t>
             </a:r>
             <a:r>
-              <a:rPr lang="ko-KR" altLang="en-US" sz="3200" smtClean="0"/>
+              <a:rPr lang="ko-KR" altLang="en-US" sz="3200"/>
               <a:t>부터</a:t>
             </a:r>
-            <a:endParaRPr lang="en-US" altLang="ko-KR" sz="3200" smtClean="0"/>
+            <a:endParaRPr lang="en-US" altLang="ko-KR" sz="3200"/>
           </a:p>
         </p:txBody>
       </p:sp>
@@ -4386,85 +4121,76 @@
               <a:buNone/>
             </a:pPr>
             <a:r>
-              <a:rPr lang="en-US" altLang="ko-KR" smtClean="0"/>
+              <a:rPr lang="en-US" altLang="ko-KR"/>
               <a:t>[</a:t>
             </a:r>
             <a:r>
-              <a:rPr lang="ko-KR" altLang="en-US" smtClean="0"/>
+              <a:rPr lang="ko-KR" altLang="en-US"/>
               <a:t>미쟝센</a:t>
             </a:r>
             <a:r>
-              <a:rPr lang="en-US" altLang="ko-KR" smtClean="0"/>
+              <a:rPr lang="en-US" altLang="ko-KR"/>
               <a:t>]</a:t>
             </a:r>
           </a:p>
           <a:p>
             <a:r>
-              <a:rPr lang="ko-KR" altLang="en-US" smtClean="0"/>
+              <a:rPr lang="ko-KR" altLang="en-US"/>
               <a:t>캐릭터 시선의 높이</a:t>
             </a:r>
-            <a:endParaRPr lang="en-US" altLang="ko-KR" smtClean="0"/>
+            <a:endParaRPr lang="en-US" altLang="ko-KR"/>
           </a:p>
           <a:p>
             <a:pPr lvl="1"/>
             <a:r>
-              <a:rPr lang="ko-KR" altLang="en-US" smtClean="0"/>
+              <a:rPr lang="ko-KR" altLang="en-US"/>
               <a:t>수녀와 아이의 시선의 높이 차이</a:t>
             </a:r>
-            <a:endParaRPr lang="en-US" altLang="ko-KR" smtClean="0"/>
+            <a:endParaRPr lang="en-US" altLang="ko-KR"/>
           </a:p>
           <a:p>
             <a:pPr lvl="1"/>
             <a:r>
-              <a:rPr lang="ko-KR" altLang="en-US" smtClean="0"/>
+              <a:rPr lang="ko-KR" altLang="en-US"/>
               <a:t>수녀가 아이의 이야기를 들어주겠다고 말은 하지만</a:t>
             </a:r>
-            <a:r>
-              <a:rPr lang="en-US" altLang="ko-KR" smtClean="0"/>
-              <a:t/>
-            </a:r>
             <a:br>
-              <a:rPr lang="en-US" altLang="ko-KR" smtClean="0"/>
+              <a:rPr lang="en-US" altLang="ko-KR"/>
             </a:br>
             <a:r>
-              <a:rPr lang="ko-KR" altLang="en-US" smtClean="0"/>
+              <a:rPr lang="ko-KR" altLang="en-US"/>
               <a:t>이야기가 끝날 때까지 아이와 시선을 맞추지 않는다</a:t>
             </a:r>
             <a:r>
-              <a:rPr lang="en-US" altLang="ko-KR" smtClean="0"/>
+              <a:rPr lang="en-US" altLang="ko-KR"/>
               <a:t>.</a:t>
             </a:r>
           </a:p>
           <a:p>
             <a:pPr lvl="1"/>
             <a:r>
-              <a:rPr lang="ko-KR" altLang="en-US" smtClean="0"/>
+              <a:rPr lang="ko-KR" altLang="en-US"/>
               <a:t>즉</a:t>
             </a:r>
             <a:r>
-              <a:rPr lang="en-US" altLang="ko-KR" smtClean="0"/>
+              <a:rPr lang="en-US" altLang="ko-KR"/>
               <a:t>, </a:t>
             </a:r>
             <a:r>
-              <a:rPr lang="ko-KR" altLang="en-US" smtClean="0"/>
+              <a:rPr lang="ko-KR" altLang="en-US"/>
               <a:t>수녀는 아이의 말을 들어줄 마음이 없다는 것을</a:t>
             </a:r>
-            <a:r>
-              <a:rPr lang="en-US" altLang="ko-KR" smtClean="0"/>
-              <a:t/>
-            </a:r>
             <a:br>
-              <a:rPr lang="en-US" altLang="ko-KR" smtClean="0"/>
+              <a:rPr lang="en-US" altLang="ko-KR"/>
             </a:br>
             <a:r>
-              <a:rPr lang="ko-KR" altLang="en-US" smtClean="0"/>
+              <a:rPr lang="ko-KR" altLang="en-US"/>
               <a:t>미쟝센을 통해 보여주는 것</a:t>
             </a:r>
             <a:r>
-              <a:rPr lang="en-US" altLang="ko-KR" smtClean="0"/>
+              <a:rPr lang="en-US" altLang="ko-KR"/>
               <a:t>.</a:t>
             </a:r>
-            <a:endParaRPr lang="en-US" altLang="ko-KR"/>
           </a:p>
           <a:p>
             <a:endParaRPr lang="ko-KR" altLang="en-US"/>
@@ -4591,22 +4317,18 @@
           <a:lstStyle/>
           <a:p>
             <a:r>
-              <a:rPr lang="ko-KR" altLang="en-US" smtClean="0"/>
+              <a:rPr lang="ko-KR" altLang="en-US"/>
               <a:t>플레이와는 상관없지만 플레이어에게 긴장감을</a:t>
             </a:r>
-            <a:r>
-              <a:rPr lang="en-US" altLang="ko-KR" smtClean="0"/>
-              <a:t/>
-            </a:r>
             <a:br>
-              <a:rPr lang="en-US" altLang="ko-KR" smtClean="0"/>
+              <a:rPr lang="en-US" altLang="ko-KR"/>
             </a:br>
             <a:r>
-              <a:rPr lang="ko-KR" altLang="en-US" smtClean="0"/>
+              <a:rPr lang="ko-KR" altLang="en-US"/>
               <a:t>주기 위해서 연출을 해주면 좋다</a:t>
             </a:r>
             <a:r>
-              <a:rPr lang="en-US" altLang="ko-KR" smtClean="0"/>
+              <a:rPr lang="en-US" altLang="ko-KR"/>
               <a:t>.</a:t>
             </a:r>
           </a:p>
@@ -4615,83 +4337,79 @@
           </a:p>
           <a:p>
             <a:r>
-              <a:rPr lang="ko-KR" altLang="en-US" smtClean="0"/>
+              <a:rPr lang="ko-KR" altLang="en-US"/>
               <a:t>세계 최고 수준의 퀘스트</a:t>
             </a:r>
-            <a:endParaRPr lang="en-US" altLang="ko-KR" smtClean="0"/>
-          </a:p>
-          <a:p>
-            <a:r>
-              <a:rPr lang="en-US" altLang="ko-KR" smtClean="0"/>
+            <a:endParaRPr lang="en-US" altLang="ko-KR"/>
+          </a:p>
+          <a:p>
+            <a:r>
+              <a:rPr lang="en-US" altLang="ko-KR"/>
               <a:t>‘</a:t>
             </a:r>
             <a:r>
-              <a:rPr lang="ko-KR" altLang="en-US" smtClean="0"/>
+              <a:rPr lang="ko-KR" altLang="en-US"/>
               <a:t>넌 떨어지지 않아</a:t>
             </a:r>
             <a:r>
-              <a:rPr lang="en-US" altLang="ko-KR" smtClean="0"/>
+              <a:rPr lang="en-US" altLang="ko-KR"/>
               <a:t>. </a:t>
             </a:r>
             <a:r>
-              <a:rPr lang="ko-KR" altLang="en-US" smtClean="0"/>
+              <a:rPr lang="ko-KR" altLang="en-US"/>
               <a:t>멋지게 뛰어봐</a:t>
             </a:r>
             <a:r>
-              <a:rPr lang="en-US" altLang="ko-KR" smtClean="0"/>
+              <a:rPr lang="en-US" altLang="ko-KR"/>
               <a:t>!’</a:t>
             </a:r>
           </a:p>
           <a:p>
             <a:r>
-              <a:rPr lang="ko-KR" altLang="en-US" smtClean="0"/>
+              <a:rPr lang="ko-KR" altLang="en-US"/>
               <a:t>성장의 발돋움</a:t>
             </a:r>
-            <a:endParaRPr lang="en-US" altLang="ko-KR" smtClean="0"/>
-          </a:p>
-          <a:p>
-            <a:r>
-              <a:rPr lang="ko-KR" altLang="en-US" smtClean="0"/>
+            <a:endParaRPr lang="en-US" altLang="ko-KR"/>
+          </a:p>
+          <a:p>
+            <a:r>
+              <a:rPr lang="ko-KR" altLang="en-US"/>
               <a:t>다른 건물로 넘어가는 과정에서</a:t>
             </a:r>
-            <a:r>
-              <a:rPr lang="en-US" altLang="ko-KR" smtClean="0"/>
-              <a:t/>
-            </a:r>
             <a:br>
-              <a:rPr lang="en-US" altLang="ko-KR" smtClean="0"/>
+              <a:rPr lang="en-US" altLang="ko-KR"/>
             </a:br>
             <a:r>
-              <a:rPr lang="ko-KR" altLang="en-US" smtClean="0"/>
+              <a:rPr lang="ko-KR" altLang="en-US"/>
               <a:t>주인공의 성장을 표현할 수 있다</a:t>
             </a:r>
             <a:r>
-              <a:rPr lang="en-US" altLang="ko-KR" smtClean="0"/>
+              <a:rPr lang="en-US" altLang="ko-KR"/>
               <a:t>.</a:t>
             </a:r>
             <a:br>
-              <a:rPr lang="en-US" altLang="ko-KR" smtClean="0"/>
+              <a:rPr lang="en-US" altLang="ko-KR"/>
             </a:br>
             <a:r>
-              <a:rPr lang="en-US" altLang="ko-KR" smtClean="0"/>
+              <a:rPr lang="en-US" altLang="ko-KR"/>
               <a:t>(</a:t>
             </a:r>
             <a:r>
-              <a:rPr lang="ko-KR" altLang="en-US" smtClean="0"/>
+              <a:rPr lang="ko-KR" altLang="en-US"/>
               <a:t>교회 건물에서 다른 건물로 이동</a:t>
             </a:r>
             <a:r>
-              <a:rPr lang="en-US" altLang="ko-KR" smtClean="0"/>
+              <a:rPr lang="en-US" altLang="ko-KR"/>
               <a:t>)</a:t>
             </a:r>
           </a:p>
           <a:p>
             <a:r>
-              <a:rPr lang="ko-KR" altLang="en-US" smtClean="0"/>
+              <a:rPr lang="ko-KR" altLang="en-US"/>
               <a:t>플레이라기보다는 </a:t>
             </a:r>
             <a:r>
-              <a:rPr lang="ko-KR" altLang="en-US" b="1" smtClean="0">
+              <a:rPr lang="ko-KR" altLang="en-US" b="1">
                 <a:solidFill>
                   <a:srgbClr val="FF0000"/>
                 </a:solidFill>
@@ -4699,25 +4417,25 @@
               <a:t>이벤트 연출</a:t>
             </a:r>
             <a:r>
-              <a:rPr lang="ko-KR" altLang="en-US" smtClean="0"/>
+              <a:rPr lang="ko-KR" altLang="en-US"/>
               <a:t>이다</a:t>
             </a:r>
             <a:r>
-              <a:rPr lang="en-US" altLang="ko-KR" smtClean="0"/>
+              <a:rPr lang="en-US" altLang="ko-KR"/>
               <a:t>.</a:t>
             </a:r>
           </a:p>
           <a:p>
             <a:r>
-              <a:rPr lang="ko-KR" altLang="en-US" b="1" smtClean="0"/>
+              <a:rPr lang="ko-KR" altLang="en-US" b="1"/>
               <a:t>이벤트 연출</a:t>
             </a:r>
             <a:r>
-              <a:rPr lang="ko-KR" altLang="en-US" smtClean="0"/>
+              <a:rPr lang="ko-KR" altLang="en-US"/>
               <a:t>에는 실패가 없다</a:t>
             </a:r>
             <a:r>
-              <a:rPr lang="en-US" altLang="ko-KR" smtClean="0"/>
+              <a:rPr lang="en-US" altLang="ko-KR"/>
               <a:t>.</a:t>
             </a:r>
             <a:endParaRPr lang="ko-KR" altLang="en-US" b="1"/>
@@ -4771,46 +4489,46 @@
           <a:lstStyle/>
           <a:p>
             <a:r>
-              <a:rPr lang="en-US" altLang="ko-KR" sz="3200" smtClean="0"/>
+              <a:rPr lang="en-US" altLang="ko-KR" sz="3200"/>
               <a:t>[</a:t>
             </a:r>
             <a:r>
-              <a:rPr lang="ko-KR" altLang="en-US" sz="3200" smtClean="0"/>
+              <a:rPr lang="ko-KR" altLang="en-US" sz="3200"/>
               <a:t>언차티드</a:t>
             </a:r>
             <a:r>
-              <a:rPr lang="en-US" altLang="ko-KR" sz="3200" smtClean="0"/>
+              <a:rPr lang="en-US" altLang="ko-KR" sz="3200"/>
               <a:t>4</a:t>
             </a:r>
             <a:r>
-              <a:rPr lang="ko-KR" altLang="en-US" sz="3200" smtClean="0"/>
+              <a:rPr lang="ko-KR" altLang="en-US" sz="3200"/>
               <a:t>챕터</a:t>
             </a:r>
             <a:r>
-              <a:rPr lang="en-US" altLang="ko-KR" sz="3200" smtClean="0"/>
+              <a:rPr lang="en-US" altLang="ko-KR" sz="3200"/>
               <a:t>1 </a:t>
             </a:r>
             <a:r>
-              <a:rPr lang="ko-KR" altLang="en-US" sz="3200" smtClean="0"/>
+              <a:rPr lang="ko-KR" altLang="en-US" sz="3200"/>
               <a:t>모험의 유혹</a:t>
             </a:r>
             <a:r>
-              <a:rPr lang="en-US" altLang="ko-KR" sz="3200" smtClean="0"/>
+              <a:rPr lang="en-US" altLang="ko-KR" sz="3200"/>
               <a:t>(</a:t>
             </a:r>
             <a:r>
-              <a:rPr lang="ko-KR" altLang="en-US" sz="3200" smtClean="0"/>
+              <a:rPr lang="ko-KR" altLang="en-US" sz="3200"/>
               <a:t>매우 어려움</a:t>
             </a:r>
             <a:r>
-              <a:rPr lang="en-US" altLang="ko-KR" sz="3200" smtClean="0"/>
+              <a:rPr lang="en-US" altLang="ko-KR" sz="3200"/>
               <a:t>)] – 4:15</a:t>
             </a:r>
             <a:r>
-              <a:rPr lang="ko-KR" altLang="en-US" sz="3200" smtClean="0"/>
+              <a:rPr lang="ko-KR" altLang="en-US" sz="3200"/>
               <a:t>부터</a:t>
             </a:r>
-            <a:endParaRPr lang="en-US" altLang="ko-KR" sz="3200" smtClean="0"/>
+            <a:endParaRPr lang="en-US" altLang="ko-KR" sz="3200"/>
           </a:p>
         </p:txBody>
       </p:sp>
@@ -4884,11 +4602,11 @@
           <a:lstStyle/>
           <a:p>
             <a:r>
-              <a:rPr lang="ko-KR" altLang="en-US" smtClean="0"/>
+              <a:rPr lang="ko-KR" altLang="en-US"/>
               <a:t>걷는 타일의 속성마다 걷는 모션이 달라진다</a:t>
             </a:r>
             <a:r>
-              <a:rPr lang="en-US" altLang="ko-KR" smtClean="0"/>
+              <a:rPr lang="en-US" altLang="ko-KR"/>
               <a:t>.</a:t>
             </a:r>
           </a:p>
@@ -4897,11 +4615,11 @@
           </a:p>
           <a:p>
             <a:r>
-              <a:rPr lang="ko-KR" altLang="en-US" smtClean="0"/>
+              <a:rPr lang="ko-KR" altLang="en-US"/>
               <a:t>학습의 난이도가 점점 올라간다</a:t>
             </a:r>
             <a:r>
-              <a:rPr lang="en-US" altLang="ko-KR" smtClean="0"/>
+              <a:rPr lang="en-US" altLang="ko-KR"/>
               <a:t>.</a:t>
             </a:r>
           </a:p>
@@ -4910,71 +4628,63 @@
           </a:p>
           <a:p>
             <a:r>
-              <a:rPr lang="ko-KR" altLang="en-US" smtClean="0"/>
+              <a:rPr lang="ko-KR" altLang="en-US"/>
               <a:t>플레이어 캐릭터와 </a:t>
             </a:r>
             <a:r>
-              <a:rPr lang="en-US" altLang="ko-KR" smtClean="0"/>
+              <a:rPr lang="en-US" altLang="ko-KR"/>
               <a:t>NPC(</a:t>
             </a:r>
             <a:r>
-              <a:rPr lang="ko-KR" altLang="en-US" smtClean="0"/>
+              <a:rPr lang="ko-KR" altLang="en-US"/>
               <a:t>형</a:t>
             </a:r>
             <a:r>
-              <a:rPr lang="en-US" altLang="ko-KR" smtClean="0"/>
+              <a:rPr lang="en-US" altLang="ko-KR"/>
               <a:t>)</a:t>
             </a:r>
             <a:r>
-              <a:rPr lang="ko-KR" altLang="en-US" smtClean="0"/>
+              <a:rPr lang="ko-KR" altLang="en-US"/>
               <a:t>의 팔다리</a:t>
             </a:r>
             <a:r>
-              <a:rPr lang="en-US" altLang="ko-KR" smtClean="0"/>
+              <a:rPr lang="en-US" altLang="ko-KR"/>
               <a:t>,</a:t>
-            </a:r>
-            <a:r>
-              <a:rPr lang="en-US" altLang="ko-KR"/>
-              <a:t/>
             </a:r>
             <a:br>
               <a:rPr lang="en-US" altLang="ko-KR"/>
             </a:br>
             <a:r>
-              <a:rPr lang="ko-KR" altLang="en-US" smtClean="0"/>
+              <a:rPr lang="ko-KR" altLang="en-US"/>
               <a:t>키 차이를 활용해서 난이도를 올리는 장면</a:t>
             </a:r>
-            <a:endParaRPr lang="en-US" altLang="ko-KR" smtClean="0"/>
-          </a:p>
-          <a:p>
             <a:endParaRPr lang="en-US" altLang="ko-KR"/>
           </a:p>
           <a:p>
-            <a:r>
-              <a:rPr lang="en-US" altLang="ko-KR" smtClean="0"/>
+            <a:endParaRPr lang="en-US" altLang="ko-KR"/>
+          </a:p>
+          <a:p>
+            <a:r>
+              <a:rPr lang="en-US" altLang="ko-KR"/>
               <a:t>NPC</a:t>
             </a:r>
             <a:r>
-              <a:rPr lang="ko-KR" altLang="en-US" smtClean="0"/>
+              <a:rPr lang="ko-KR" altLang="en-US"/>
               <a:t>의 모든 행동의 절차 수행 조건은</a:t>
             </a:r>
-            <a:r>
-              <a:rPr lang="en-US" altLang="ko-KR" smtClean="0"/>
-              <a:t/>
-            </a:r>
             <a:br>
-              <a:rPr lang="en-US" altLang="ko-KR" smtClean="0"/>
+              <a:rPr lang="en-US" altLang="ko-KR"/>
             </a:br>
             <a:r>
-              <a:rPr lang="en-US" altLang="ko-KR" smtClean="0"/>
+              <a:rPr lang="en-US" altLang="ko-KR"/>
               <a:t>PC</a:t>
             </a:r>
             <a:r>
-              <a:rPr lang="ko-KR" altLang="en-US" smtClean="0"/>
+              <a:rPr lang="ko-KR" altLang="en-US"/>
               <a:t>의 위치다</a:t>
             </a:r>
             <a:r>
-              <a:rPr lang="en-US" altLang="ko-KR" smtClean="0"/>
+              <a:rPr lang="en-US" altLang="ko-KR"/>
               <a:t>.</a:t>
             </a:r>
             <a:endParaRPr lang="ko-KR" altLang="en-US"/>
@@ -5004,46 +4714,46 @@
           <a:lstStyle/>
           <a:p>
             <a:r>
-              <a:rPr lang="en-US" altLang="ko-KR" sz="3200" smtClean="0"/>
+              <a:rPr lang="en-US" altLang="ko-KR" sz="3200"/>
               <a:t>[</a:t>
             </a:r>
             <a:r>
-              <a:rPr lang="ko-KR" altLang="en-US" sz="3200" smtClean="0"/>
+              <a:rPr lang="ko-KR" altLang="en-US" sz="3200"/>
               <a:t>언차티드</a:t>
             </a:r>
             <a:r>
-              <a:rPr lang="en-US" altLang="ko-KR" sz="3200" smtClean="0"/>
+              <a:rPr lang="en-US" altLang="ko-KR" sz="3200"/>
               <a:t>4</a:t>
             </a:r>
             <a:r>
-              <a:rPr lang="ko-KR" altLang="en-US" sz="3200" smtClean="0"/>
+              <a:rPr lang="ko-KR" altLang="en-US" sz="3200"/>
               <a:t>챕터</a:t>
             </a:r>
             <a:r>
-              <a:rPr lang="en-US" altLang="ko-KR" sz="3200" smtClean="0"/>
+              <a:rPr lang="en-US" altLang="ko-KR" sz="3200"/>
               <a:t>1 </a:t>
             </a:r>
             <a:r>
-              <a:rPr lang="ko-KR" altLang="en-US" sz="3200" smtClean="0"/>
+              <a:rPr lang="ko-KR" altLang="en-US" sz="3200"/>
               <a:t>모험의 유혹</a:t>
             </a:r>
             <a:r>
-              <a:rPr lang="en-US" altLang="ko-KR" sz="3200" smtClean="0"/>
+              <a:rPr lang="en-US" altLang="ko-KR" sz="3200"/>
               <a:t>(</a:t>
             </a:r>
             <a:r>
-              <a:rPr lang="ko-KR" altLang="en-US" sz="3200" smtClean="0"/>
+              <a:rPr lang="ko-KR" altLang="en-US" sz="3200"/>
               <a:t>매우 어려움</a:t>
             </a:r>
             <a:r>
-              <a:rPr lang="en-US" altLang="ko-KR" sz="3200" smtClean="0"/>
+              <a:rPr lang="en-US" altLang="ko-KR" sz="3200"/>
               <a:t>)] – 4:15</a:t>
             </a:r>
             <a:r>
-              <a:rPr lang="ko-KR" altLang="en-US" sz="3200" smtClean="0"/>
+              <a:rPr lang="ko-KR" altLang="en-US" sz="3200"/>
               <a:t>부터</a:t>
             </a:r>
-            <a:endParaRPr lang="en-US" altLang="ko-KR" sz="3200" smtClean="0"/>
+            <a:endParaRPr lang="en-US" altLang="ko-KR" sz="3200"/>
           </a:p>
         </p:txBody>
       </p:sp>
@@ -5122,29 +4832,29 @@
           <a:lstStyle/>
           <a:p>
             <a:r>
-              <a:rPr lang="ko-KR" altLang="en-US" smtClean="0"/>
+              <a:rPr lang="ko-KR" altLang="en-US"/>
               <a:t>이야기적인 보상</a:t>
             </a:r>
-            <a:endParaRPr lang="en-US" altLang="ko-KR" smtClean="0"/>
+            <a:endParaRPr lang="en-US" altLang="ko-KR"/>
           </a:p>
           <a:p>
             <a:pPr lvl="1"/>
             <a:r>
-              <a:rPr lang="ko-KR" altLang="en-US" smtClean="0"/>
+              <a:rPr lang="ko-KR" altLang="en-US"/>
               <a:t>퀘스트 성공에 대해 다음 이야기에 대한 장면</a:t>
             </a:r>
             <a:endParaRPr lang="en-US" altLang="ko-KR"/>
           </a:p>
           <a:p>
-            <a:endParaRPr lang="en-US" altLang="ko-KR" smtClean="0"/>
-          </a:p>
-          <a:p>
-            <a:r>
-              <a:rPr lang="ko-KR" altLang="en-US" smtClean="0"/>
+            <a:endParaRPr lang="en-US" altLang="ko-KR"/>
+          </a:p>
+          <a:p>
+            <a:r>
+              <a:rPr lang="ko-KR" altLang="en-US"/>
               <a:t>이야기적인 상황과 플레이적인 상황을 명확하게 설계하도록 하자</a:t>
             </a:r>
             <a:r>
-              <a:rPr lang="en-US" altLang="ko-KR" smtClean="0"/>
+              <a:rPr lang="en-US" altLang="ko-KR"/>
               <a:t>.</a:t>
             </a:r>
             <a:endParaRPr lang="ko-KR" altLang="en-US"/>
@@ -5174,46 +4884,46 @@
           <a:lstStyle/>
           <a:p>
             <a:r>
-              <a:rPr lang="en-US" altLang="ko-KR" sz="3200" smtClean="0"/>
+              <a:rPr lang="en-US" altLang="ko-KR" sz="3200"/>
               <a:t>[</a:t>
             </a:r>
             <a:r>
-              <a:rPr lang="ko-KR" altLang="en-US" sz="3200" smtClean="0"/>
+              <a:rPr lang="ko-KR" altLang="en-US" sz="3200"/>
               <a:t>언차티드</a:t>
             </a:r>
             <a:r>
-              <a:rPr lang="en-US" altLang="ko-KR" sz="3200" smtClean="0"/>
+              <a:rPr lang="en-US" altLang="ko-KR" sz="3200"/>
               <a:t>4</a:t>
             </a:r>
             <a:r>
-              <a:rPr lang="ko-KR" altLang="en-US" sz="3200" smtClean="0"/>
+              <a:rPr lang="ko-KR" altLang="en-US" sz="3200"/>
               <a:t>챕터</a:t>
             </a:r>
             <a:r>
-              <a:rPr lang="en-US" altLang="ko-KR" sz="3200" smtClean="0"/>
+              <a:rPr lang="en-US" altLang="ko-KR" sz="3200"/>
               <a:t>1 </a:t>
             </a:r>
             <a:r>
-              <a:rPr lang="ko-KR" altLang="en-US" sz="3200" smtClean="0"/>
+              <a:rPr lang="ko-KR" altLang="en-US" sz="3200"/>
               <a:t>모험의 유혹</a:t>
             </a:r>
             <a:r>
-              <a:rPr lang="en-US" altLang="ko-KR" sz="3200" smtClean="0"/>
+              <a:rPr lang="en-US" altLang="ko-KR" sz="3200"/>
               <a:t>(</a:t>
             </a:r>
             <a:r>
-              <a:rPr lang="ko-KR" altLang="en-US" sz="3200" smtClean="0"/>
+              <a:rPr lang="ko-KR" altLang="en-US" sz="3200"/>
               <a:t>매우 어려움</a:t>
             </a:r>
             <a:r>
-              <a:rPr lang="en-US" altLang="ko-KR" sz="3200" smtClean="0"/>
+              <a:rPr lang="en-US" altLang="ko-KR" sz="3200"/>
               <a:t>)] – 4:15</a:t>
             </a:r>
             <a:r>
-              <a:rPr lang="ko-KR" altLang="en-US" sz="3200" smtClean="0"/>
+              <a:rPr lang="ko-KR" altLang="en-US" sz="3200"/>
               <a:t>부터</a:t>
             </a:r>
-            <a:endParaRPr lang="en-US" altLang="ko-KR" sz="3200" smtClean="0"/>
+            <a:endParaRPr lang="en-US" altLang="ko-KR" sz="3200"/>
           </a:p>
         </p:txBody>
       </p:sp>
